--- a/DataAnalysis_Track/decks/DA_S02_Why_data_lives_in_several_tables.pptx
+++ b/DataAnalysis_Track/decks/DA_S02_Why_data_lives_in_several_tables.pptx
@@ -480,7 +480,7 @@
 </file>
 
 <file path=ppt/notesSlides/notesSlide1.xml><?xml version="1.0" encoding="utf-8"?>
-<p:notes xmlns:a="http://schemas.openxmlformats.org/drawingml/2006/main" xmlns:p="http://schemas.openxmlformats.org/presentationml/2006/main" xmlns:r="http://schemas.openxmlformats.org/officeDocument/2006/relationships">
+<p:notes xmlns:a="http://schemas.openxmlformats.org/drawingml/2006/main" xmlns:p="http://schemas.openxmlformats.org/presentationml/2006/main">
   <p:cSld>
     <p:spTree>
       <p:nvGrpSpPr>
@@ -524,7 +524,42 @@
           <a:lstStyle/>
           <a:p>
             <a:r>
+              <a:t>TEACHING PURPOSE</a:t>
+            </a:r>
+          </a:p>
+          <a:p>
+            <a:r>
+              <a:t>Why data lives in several tables</a:t>
+            </a:r>
+          </a:p>
+          <a:p>
+            <a:r>
+              <a:t/>
+            </a:r>
+          </a:p>
+          <a:p>
+            <a:r>
+              <a:t>LECTURER CUE</a:t>
+            </a:r>
+          </a:p>
+          <a:p>
+            <a:r>
               <a:t>Start on time.</a:t>
+            </a:r>
+          </a:p>
+          <a:p>
+            <a:r>
+              <a:t/>
+            </a:r>
+          </a:p>
+          <a:p>
+            <a:r>
+              <a:t>NEXT</a:t>
+            </a:r>
+          </a:p>
+          <a:p>
+            <a:r>
+              <a:t>Where tonight sits. Move on after a learner can explain the current example or required action.</a:t>
             </a:r>
           </a:p>
         </p:txBody>
@@ -550,7 +585,7 @@
 </file>
 
 <file path=ppt/notesSlides/notesSlide10.xml><?xml version="1.0" encoding="utf-8"?>
-<p:notes xmlns:a="http://schemas.openxmlformats.org/drawingml/2006/main" xmlns:p="http://schemas.openxmlformats.org/presentationml/2006/main" xmlns:r="http://schemas.openxmlformats.org/officeDocument/2006/relationships">
+<p:notes xmlns:a="http://schemas.openxmlformats.org/drawingml/2006/main" xmlns:p="http://schemas.openxmlformats.org/presentationml/2006/main">
   <p:cSld>
     <p:spTree>
       <p:nvGrpSpPr>
@@ -594,7 +629,117 @@
           <a:lstStyle/>
           <a:p>
             <a:r>
+              <a:t>TEACHING PURPOSE</a:t>
+            </a:r>
+          </a:p>
+          <a:p>
+            <a:r>
+              <a:t>The same business, two different grains</a:t>
+            </a:r>
+          </a:p>
+          <a:p>
+            <a:r>
+              <a:t/>
+            </a:r>
+          </a:p>
+          <a:p>
+            <a:r>
+              <a:t>CONNECT</a:t>
+            </a:r>
+          </a:p>
+          <a:p>
+            <a:r>
+              <a:t>Build on the preceding slide: One-to-many.</a:t>
+            </a:r>
+          </a:p>
+          <a:p>
+            <a:r>
+              <a:t/>
+            </a:r>
+          </a:p>
+          <a:p>
+            <a:r>
+              <a:t>LECTURER CUE</a:t>
+            </a:r>
+          </a:p>
+          <a:p>
+            <a:r>
               <a:t>Left: one row is one order. Right: one row is one order line, so an order appears more than once. Both are real rows from the course data. The caption is the number to remember.</a:t>
+            </a:r>
+          </a:p>
+          <a:p>
+            <a:r>
+              <a:t/>
+            </a:r>
+          </a:p>
+          <a:p>
+            <a:r>
+              <a:t>EXPLAIN IN ORDINARY WORDS</a:t>
+            </a:r>
+          </a:p>
+          <a:p>
+            <a:r>
+              <a:t>Grain means what one row represents. A key identifies a row; a primary key may use more than one column. A join matches keys, and multiple matches can multiply rows.</a:t>
+            </a:r>
+          </a:p>
+          <a:p>
+            <a:r>
+              <a:t/>
+            </a:r>
+          </a:p>
+          <a:p>
+            <a:r>
+              <a:t>CHECK AND EXPECTED ANSWER</a:t>
+            </a:r>
+          </a:p>
+          <a:p>
+            <a:r>
+              <a:t>One order has two lines. After joining orders to lines, how many rows for it? Two. Summing a repeated order-level total would double-count.</a:t>
+            </a:r>
+          </a:p>
+          <a:p>
+            <a:r>
+              <a:t/>
+            </a:r>
+          </a:p>
+          <a:p>
+            <a:r>
+              <a:t>IF LEARNERS ARE STUCK</a:t>
+            </a:r>
+          </a:p>
+          <a:p>
+            <a:r>
+              <a:t>Write one example row from each table. Circle keys and trace each match. Aggregate to the intended grain and check counts and totals.</a:t>
+            </a:r>
+          </a:p>
+          <a:p>
+            <a:r>
+              <a:t/>
+            </a:r>
+          </a:p>
+          <a:p>
+            <a:r>
+              <a:t>READ THE VISUAL</a:t>
+            </a:r>
+          </a:p>
+          <a:p>
+            <a:r>
+              <a:t>Start with the title and labels. Read one row or mark aloud, including its unit. Let a learner read a second one before discussing the pattern. Do not infer a numerical value from an unlabelled drawing.</a:t>
+            </a:r>
+          </a:p>
+          <a:p>
+            <a:r>
+              <a:t/>
+            </a:r>
+          </a:p>
+          <a:p>
+            <a:r>
+              <a:t>NEXT</a:t>
+            </a:r>
+          </a:p>
+          <a:p>
+            <a:r>
+              <a:t>Break. Move on after a learner can explain the current example or required action.</a:t>
             </a:r>
           </a:p>
         </p:txBody>
@@ -619,8 +764,8 @@
 </p:notes>
 </file>
 
-<file path=ppt/notesSlides/notesSlide11.xml><?xml version="1.0" encoding="utf-8"?>
-<p:notes xmlns:a="http://schemas.openxmlformats.org/drawingml/2006/main" xmlns:p="http://schemas.openxmlformats.org/presentationml/2006/main" xmlns:r="http://schemas.openxmlformats.org/officeDocument/2006/relationships">
+<file path=ppt/notesSlides/notesSlide10006.xml><?xml version="1.0" encoding="utf-8"?>
+<p:notes xmlns:a="http://schemas.openxmlformats.org/drawingml/2006/main" xmlns:p="http://schemas.openxmlformats.org/presentationml/2006/main">
   <p:cSld>
     <p:spTree>
       <p:nvGrpSpPr>
@@ -664,7 +809,57 @@
           <a:lstStyle/>
           <a:p>
             <a:r>
-              <a:t>Ten minutes.</a:t>
+              <a:t>TEACHING PURPOSE</a:t>
+            </a:r>
+          </a:p>
+          <a:p>
+            <a:r>
+              <a:t>Why not one big sheet</a:t>
+            </a:r>
+          </a:p>
+          <a:p>
+            <a:r>
+              <a:t/>
+            </a:r>
+          </a:p>
+          <a:p>
+            <a:r>
+              <a:t>CONNECT</a:t>
+            </a:r>
+          </a:p>
+          <a:p>
+            <a:r>
+              <a:t>Build on the preceding slide: Why is this data in six tables.</a:t>
+            </a:r>
+          </a:p>
+          <a:p>
+            <a:r>
+              <a:t/>
+            </a:r>
+          </a:p>
+          <a:p>
+            <a:r>
+              <a:t>DELIVER THIS SLIDE</a:t>
+            </a:r>
+          </a:p>
+          <a:p>
+            <a:r>
+              <a:t>Read the stated purpose, then point to the named example or action on the slide. Ask learners to describe what they will do before moving on. For a break slide, announce the return time; for a section divider, name the next concrete task.</a:t>
+            </a:r>
+          </a:p>
+          <a:p>
+            <a:r>
+              <a:t/>
+            </a:r>
+          </a:p>
+          <a:p>
+            <a:r>
+              <a:t>NEXT</a:t>
+            </a:r>
+          </a:p>
+          <a:p>
+            <a:r>
+              <a:t>What goes wrong with one big sheet. Move on after a learner can explain the current example or required action.</a:t>
             </a:r>
           </a:p>
         </p:txBody>
@@ -689,8 +884,8 @@
 </p:notes>
 </file>
 
-<file path=ppt/notesSlides/notesSlide12.xml><?xml version="1.0" encoding="utf-8"?>
-<p:notes xmlns:a="http://schemas.openxmlformats.org/drawingml/2006/main" xmlns:p="http://schemas.openxmlformats.org/presentationml/2006/main" xmlns:r="http://schemas.openxmlformats.org/officeDocument/2006/relationships">
+<file path=ppt/notesSlides/notesSlide10013.xml><?xml version="1.0" encoding="utf-8"?>
+<p:notes xmlns:a="http://schemas.openxmlformats.org/drawingml/2006/main" xmlns:p="http://schemas.openxmlformats.org/presentationml/2006/main">
   <p:cSld>
     <p:spTree>
       <p:nvGrpSpPr>
@@ -734,7 +929,87 @@
           <a:lstStyle/>
           <a:p>
             <a:r>
-              <a:t>Real counts from the course data. The INNER JOIN loses the 172 walk-in orders because they have no customer to match, and nothing in the output says so.</a:t>
+              <a:t>TEACHING PURPOSE</a:t>
+            </a:r>
+          </a:p>
+          <a:p>
+            <a:r>
+              <a:t>Grain, keys, and what a join does</a:t>
+            </a:r>
+          </a:p>
+          <a:p>
+            <a:r>
+              <a:t/>
+            </a:r>
+          </a:p>
+          <a:p>
+            <a:r>
+              <a:t>CONNECT</a:t>
+            </a:r>
+          </a:p>
+          <a:p>
+            <a:r>
+              <a:t>Build on the preceding slide: Break.</a:t>
+            </a:r>
+          </a:p>
+          <a:p>
+            <a:r>
+              <a:t/>
+            </a:r>
+          </a:p>
+          <a:p>
+            <a:r>
+              <a:t>EXPLAIN IN ORDINARY WORDS</a:t>
+            </a:r>
+          </a:p>
+          <a:p>
+            <a:r>
+              <a:t>Grain means what one row represents. A key identifies a row; a primary key may use more than one column. A join matches keys, and multiple matches can multiply rows.</a:t>
+            </a:r>
+          </a:p>
+          <a:p>
+            <a:r>
+              <a:t/>
+            </a:r>
+          </a:p>
+          <a:p>
+            <a:r>
+              <a:t>CHECK AND EXPECTED ANSWER</a:t>
+            </a:r>
+          </a:p>
+          <a:p>
+            <a:r>
+              <a:t>One order has two lines. After joining orders to lines, how many rows for it? Two. Summing a repeated order-level total would double-count.</a:t>
+            </a:r>
+          </a:p>
+          <a:p>
+            <a:r>
+              <a:t/>
+            </a:r>
+          </a:p>
+          <a:p>
+            <a:r>
+              <a:t>IF LEARNERS ARE STUCK</a:t>
+            </a:r>
+          </a:p>
+          <a:p>
+            <a:r>
+              <a:t>Write one example row from each table. Circle keys and trace each match. Aggregate to the intended grain and check counts and totals.</a:t>
+            </a:r>
+          </a:p>
+          <a:p>
+            <a:r>
+              <a:t/>
+            </a:r>
+          </a:p>
+          <a:p>
+            <a:r>
+              <a:t>NEXT</a:t>
+            </a:r>
+          </a:p>
+          <a:p>
+            <a:r>
+              <a:t>What a join does, and what an INNER JOIN quietly throws away. Move on after a learner can explain the current example or required action.</a:t>
             </a:r>
           </a:p>
         </p:txBody>
@@ -759,8 +1034,8 @@
 </p:notes>
 </file>
 
-<file path=ppt/notesSlides/notesSlide13.xml><?xml version="1.0" encoding="utf-8"?>
-<p:notes xmlns:a="http://schemas.openxmlformats.org/drawingml/2006/main" xmlns:p="http://schemas.openxmlformats.org/presentationml/2006/main" xmlns:r="http://schemas.openxmlformats.org/officeDocument/2006/relationships">
+<file path=ppt/notesSlides/notesSlide11.xml><?xml version="1.0" encoding="utf-8"?>
+<p:notes xmlns:a="http://schemas.openxmlformats.org/drawingml/2006/main" xmlns:p="http://schemas.openxmlformats.org/presentationml/2006/main">
   <p:cSld>
     <p:spTree>
       <p:nvGrpSpPr>
@@ -804,7 +1079,57 @@
           <a:lstStyle/>
           <a:p>
             <a:r>
-              <a:t>You will build exactly this in Power BI in session 14. Tonight you only need to see that the arrows all point the same way: many orders to one customer.</a:t>
+              <a:t>TEACHING PURPOSE</a:t>
+            </a:r>
+          </a:p>
+          <a:p>
+            <a:r>
+              <a:t>Break</a:t>
+            </a:r>
+          </a:p>
+          <a:p>
+            <a:r>
+              <a:t/>
+            </a:r>
+          </a:p>
+          <a:p>
+            <a:r>
+              <a:t>CONNECT</a:t>
+            </a:r>
+          </a:p>
+          <a:p>
+            <a:r>
+              <a:t>Build on the preceding slide: The same business, two different grains.</a:t>
+            </a:r>
+          </a:p>
+          <a:p>
+            <a:r>
+              <a:t/>
+            </a:r>
+          </a:p>
+          <a:p>
+            <a:r>
+              <a:t>LECTURER CUE</a:t>
+            </a:r>
+          </a:p>
+          <a:p>
+            <a:r>
+              <a:t>Ten minutes.</a:t>
+            </a:r>
+          </a:p>
+          <a:p>
+            <a:r>
+              <a:t/>
+            </a:r>
+          </a:p>
+          <a:p>
+            <a:r>
+              <a:t>NEXT</a:t>
+            </a:r>
+          </a:p>
+          <a:p>
+            <a:r>
+              <a:t>Grain, keys, and what a join does. Move on after a learner can explain the current example or required action.</a:t>
             </a:r>
           </a:p>
         </p:txBody>
@@ -829,8 +1154,8 @@
 </p:notes>
 </file>
 
-<file path=ppt/notesSlides/notesSlide14.xml><?xml version="1.0" encoding="utf-8"?>
-<p:notes xmlns:a="http://schemas.openxmlformats.org/drawingml/2006/main" xmlns:p="http://schemas.openxmlformats.org/presentationml/2006/main" xmlns:r="http://schemas.openxmlformats.org/officeDocument/2006/relationships">
+<file path=ppt/notesSlides/notesSlide12.xml><?xml version="1.0" encoding="utf-8"?>
+<p:notes xmlns:a="http://schemas.openxmlformats.org/drawingml/2006/main" xmlns:p="http://schemas.openxmlformats.org/presentationml/2006/main">
   <p:cSld>
     <p:spTree>
       <p:nvGrpSpPr>
@@ -872,7 +1197,121 @@
         <p:txBody>
           <a:bodyPr/>
           <a:lstStyle/>
-          <a:p/>
+          <a:p>
+            <a:r>
+              <a:t>TEACHING PURPOSE</a:t>
+            </a:r>
+          </a:p>
+          <a:p>
+            <a:r>
+              <a:t>What a join does, and what an INNER JOIN quietly throws away</a:t>
+            </a:r>
+          </a:p>
+          <a:p>
+            <a:r>
+              <a:t/>
+            </a:r>
+          </a:p>
+          <a:p>
+            <a:r>
+              <a:t>CONNECT</a:t>
+            </a:r>
+          </a:p>
+          <a:p>
+            <a:r>
+              <a:t>Build on the preceding slide: Grain, keys, and what a join does.</a:t>
+            </a:r>
+          </a:p>
+          <a:p>
+            <a:r>
+              <a:t/>
+            </a:r>
+          </a:p>
+          <a:p>
+            <a:r>
+              <a:t>LECTURER CUE</a:t>
+            </a:r>
+          </a:p>
+          <a:p>
+            <a:r>
+              <a:t>Real counts from the course data. The INNER JOIN loses the 172 walk-in orders because they have no customer to match, and nothing in the output says so.</a:t>
+            </a:r>
+          </a:p>
+          <a:p>
+            <a:r>
+              <a:t/>
+            </a:r>
+          </a:p>
+          <a:p>
+            <a:r>
+              <a:t>EXPLAIN IN ORDINARY WORDS</a:t>
+            </a:r>
+          </a:p>
+          <a:p>
+            <a:r>
+              <a:t>Grain means what one row represents. A key identifies a row; a primary key may use more than one column. A join matches keys, and multiple matches can multiply rows.</a:t>
+            </a:r>
+          </a:p>
+          <a:p>
+            <a:r>
+              <a:t/>
+            </a:r>
+          </a:p>
+          <a:p>
+            <a:r>
+              <a:t>CHECK AND EXPECTED ANSWER</a:t>
+            </a:r>
+          </a:p>
+          <a:p>
+            <a:r>
+              <a:t>One order has two lines. After joining orders to lines, how many rows for it? Two. Summing a repeated order-level total would double-count.</a:t>
+            </a:r>
+          </a:p>
+          <a:p>
+            <a:r>
+              <a:t/>
+            </a:r>
+          </a:p>
+          <a:p>
+            <a:r>
+              <a:t>IF LEARNERS ARE STUCK</a:t>
+            </a:r>
+          </a:p>
+          <a:p>
+            <a:r>
+              <a:t>Write one example row from each table. Circle keys and trace each match. Aggregate to the intended grain and check counts and totals.</a:t>
+            </a:r>
+          </a:p>
+          <a:p>
+            <a:r>
+              <a:t/>
+            </a:r>
+          </a:p>
+          <a:p>
+            <a:r>
+              <a:t>READ THE VISUAL</a:t>
+            </a:r>
+          </a:p>
+          <a:p>
+            <a:r>
+              <a:t>Start with the title and labels. Read one row or mark aloud, including its unit. Let a learner read a second one before discussing the pattern. Do not infer a numerical value from an unlabelled drawing.</a:t>
+            </a:r>
+          </a:p>
+          <a:p>
+            <a:r>
+              <a:t/>
+            </a:r>
+          </a:p>
+          <a:p>
+            <a:r>
+              <a:t>NEXT</a:t>
+            </a:r>
+          </a:p>
+          <a:p>
+            <a:r>
+              <a:t>The six tables, and how they connect. Move on after a learner can explain the current example or required action.</a:t>
+            </a:r>
+          </a:p>
         </p:txBody>
       </p:sp>
       <p:sp>
@@ -895,8 +1334,8 @@
 </p:notes>
 </file>
 
-<file path=ppt/notesSlides/notesSlide15.xml><?xml version="1.0" encoding="utf-8"?>
-<p:notes xmlns:a="http://schemas.openxmlformats.org/drawingml/2006/main" xmlns:p="http://schemas.openxmlformats.org/presentationml/2006/main" xmlns:r="http://schemas.openxmlformats.org/officeDocument/2006/relationships">
+<file path=ppt/notesSlides/notesSlide13.xml><?xml version="1.0" encoding="utf-8"?>
+<p:notes xmlns:a="http://schemas.openxmlformats.org/drawingml/2006/main" xmlns:p="http://schemas.openxmlformats.org/presentationml/2006/main">
   <p:cSld>
     <p:spTree>
       <p:nvGrpSpPr>
@@ -940,7 +1379,72 @@
           <a:lstStyle/>
           <a:p>
             <a:r>
-              <a:t>Assuming one row means what you assume it means. Every wrong total later in this course comes from a grain nobody said out loud.</a:t>
+              <a:t>TEACHING PURPOSE</a:t>
+            </a:r>
+          </a:p>
+          <a:p>
+            <a:r>
+              <a:t>The six tables, and how they connect</a:t>
+            </a:r>
+          </a:p>
+          <a:p>
+            <a:r>
+              <a:t/>
+            </a:r>
+          </a:p>
+          <a:p>
+            <a:r>
+              <a:t>CONNECT</a:t>
+            </a:r>
+          </a:p>
+          <a:p>
+            <a:r>
+              <a:t>Build on the preceding slide: What a join does, and what an INNER JOIN quietly throws away.</a:t>
+            </a:r>
+          </a:p>
+          <a:p>
+            <a:r>
+              <a:t/>
+            </a:r>
+          </a:p>
+          <a:p>
+            <a:r>
+              <a:t>LECTURER CUE</a:t>
+            </a:r>
+          </a:p>
+          <a:p>
+            <a:r>
+              <a:t>You will build exactly this in Power BI in session 14. Tonight you only need to see that the arrows all point the same way: many orders to one customer.</a:t>
+            </a:r>
+          </a:p>
+          <a:p>
+            <a:r>
+              <a:t/>
+            </a:r>
+          </a:p>
+          <a:p>
+            <a:r>
+              <a:t>READ THE VISUAL</a:t>
+            </a:r>
+          </a:p>
+          <a:p>
+            <a:r>
+              <a:t>Start with the title and labels. Read one row or mark aloud, including its unit. Let a learner read a second one before discussing the pattern. Do not infer a numerical value from an unlabelled drawing.</a:t>
+            </a:r>
+          </a:p>
+          <a:p>
+            <a:r>
+              <a:t/>
+            </a:r>
+          </a:p>
+          <a:p>
+            <a:r>
+              <a:t>NEXT</a:t>
+            </a:r>
+          </a:p>
+          <a:p>
+            <a:r>
+              <a:t>Tonight's lab has no SQL in it. Move on after a learner can explain the current example or required action.</a:t>
             </a:r>
           </a:p>
         </p:txBody>
@@ -965,8 +1469,8 @@
 </p:notes>
 </file>
 
-<file path=ppt/notesSlides/notesSlide16.xml><?xml version="1.0" encoding="utf-8"?>
-<p:notes xmlns:a="http://schemas.openxmlformats.org/drawingml/2006/main" xmlns:p="http://schemas.openxmlformats.org/presentationml/2006/main" xmlns:r="http://schemas.openxmlformats.org/officeDocument/2006/relationships">
+<file path=ppt/notesSlides/notesSlide14.xml><?xml version="1.0" encoding="utf-8"?>
+<p:notes xmlns:a="http://schemas.openxmlformats.org/drawingml/2006/main" xmlns:p="http://schemas.openxmlformats.org/presentationml/2006/main">
   <p:cSld>
     <p:spTree>
       <p:nvGrpSpPr>
@@ -1008,7 +1512,91 @@
         <p:txBody>
           <a:bodyPr/>
           <a:lstStyle/>
-          <a:p/>
+          <a:p>
+            <a:r>
+              <a:t>TEACHING PURPOSE</a:t>
+            </a:r>
+          </a:p>
+          <a:p>
+            <a:r>
+              <a:t>Tonight's lab has no SQL in it</a:t>
+            </a:r>
+          </a:p>
+          <a:p>
+            <a:r>
+              <a:t/>
+            </a:r>
+          </a:p>
+          <a:p>
+            <a:r>
+              <a:t>CONNECT</a:t>
+            </a:r>
+          </a:p>
+          <a:p>
+            <a:r>
+              <a:t>Build on the preceding slide: The six tables, and how they connect.</a:t>
+            </a:r>
+          </a:p>
+          <a:p>
+            <a:r>
+              <a:t/>
+            </a:r>
+          </a:p>
+          <a:p>
+            <a:r>
+              <a:t>EXPLAIN IN ORDINARY WORDS</a:t>
+            </a:r>
+          </a:p>
+          <a:p>
+            <a:r>
+              <a:t>Grain means what one row represents. A key identifies a row; a primary key may use more than one column. A join matches keys, and multiple matches can multiply rows.</a:t>
+            </a:r>
+          </a:p>
+          <a:p>
+            <a:r>
+              <a:t/>
+            </a:r>
+          </a:p>
+          <a:p>
+            <a:r>
+              <a:t>CHECK AND EXPECTED ANSWER</a:t>
+            </a:r>
+          </a:p>
+          <a:p>
+            <a:r>
+              <a:t>One order has two lines. After joining orders to lines, how many rows for it? Two. Summing a repeated order-level total would double-count.</a:t>
+            </a:r>
+          </a:p>
+          <a:p>
+            <a:r>
+              <a:t/>
+            </a:r>
+          </a:p>
+          <a:p>
+            <a:r>
+              <a:t>IF LEARNERS ARE STUCK</a:t>
+            </a:r>
+          </a:p>
+          <a:p>
+            <a:r>
+              <a:t>Write one example row from each table. Circle keys and trace each match. Aggregate to the intended grain and check counts and totals.</a:t>
+            </a:r>
+          </a:p>
+          <a:p>
+            <a:r>
+              <a:t/>
+            </a:r>
+          </a:p>
+          <a:p>
+            <a:r>
+              <a:t>NEXT</a:t>
+            </a:r>
+          </a:p>
+          <a:p>
+            <a:r>
+              <a:t>Assuming one row means what you assume it means. Every wrong total later in this course comes from a grain nobody said out loud.. Move on after a learner can explain the current example or required action.</a:t>
+            </a:r>
+          </a:p>
         </p:txBody>
       </p:sp>
       <p:sp>
@@ -1031,8 +1619,8 @@
 </p:notes>
 </file>
 
-<file path=ppt/notesSlides/notesSlide17.xml><?xml version="1.0" encoding="utf-8"?>
-<p:notes xmlns:a="http://schemas.openxmlformats.org/drawingml/2006/main" xmlns:p="http://schemas.openxmlformats.org/presentationml/2006/main" xmlns:r="http://schemas.openxmlformats.org/officeDocument/2006/relationships">
+<file path=ppt/notesSlides/notesSlide15.xml><?xml version="1.0" encoding="utf-8"?>
+<p:notes xmlns:a="http://schemas.openxmlformats.org/drawingml/2006/main" xmlns:p="http://schemas.openxmlformats.org/presentationml/2006/main">
   <p:cSld>
     <p:spTree>
       <p:nvGrpSpPr>
@@ -1074,7 +1662,106 @@
         <p:txBody>
           <a:bodyPr/>
           <a:lstStyle/>
-          <a:p/>
+          <a:p>
+            <a:r>
+              <a:t>TEACHING PURPOSE</a:t>
+            </a:r>
+          </a:p>
+          <a:p>
+            <a:r>
+              <a:t>Assuming one row means what you assume it means. Every wrong total later in this course comes from a grain nobody said out loud.</a:t>
+            </a:r>
+          </a:p>
+          <a:p>
+            <a:r>
+              <a:t/>
+            </a:r>
+          </a:p>
+          <a:p>
+            <a:r>
+              <a:t>CONNECT</a:t>
+            </a:r>
+          </a:p>
+          <a:p>
+            <a:r>
+              <a:t>Build on the preceding slide: Tonight's lab has no SQL in it.</a:t>
+            </a:r>
+          </a:p>
+          <a:p>
+            <a:r>
+              <a:t/>
+            </a:r>
+          </a:p>
+          <a:p>
+            <a:r>
+              <a:t>LECTURER CUE</a:t>
+            </a:r>
+          </a:p>
+          <a:p>
+            <a:r>
+              <a:t>Assuming one row means what you assume it means. Every wrong total later in this course comes from a grain nobody said out loud.</a:t>
+            </a:r>
+          </a:p>
+          <a:p>
+            <a:r>
+              <a:t/>
+            </a:r>
+          </a:p>
+          <a:p>
+            <a:r>
+              <a:t>EXPLAIN IN ORDINARY WORDS</a:t>
+            </a:r>
+          </a:p>
+          <a:p>
+            <a:r>
+              <a:t>Grain means what one row represents. A key identifies a row; a primary key may use more than one column. A join matches keys, and multiple matches can multiply rows.</a:t>
+            </a:r>
+          </a:p>
+          <a:p>
+            <a:r>
+              <a:t/>
+            </a:r>
+          </a:p>
+          <a:p>
+            <a:r>
+              <a:t>CHECK AND EXPECTED ANSWER</a:t>
+            </a:r>
+          </a:p>
+          <a:p>
+            <a:r>
+              <a:t>One order has two lines. After joining orders to lines, how many rows for it? Two. Summing a repeated order-level total would double-count.</a:t>
+            </a:r>
+          </a:p>
+          <a:p>
+            <a:r>
+              <a:t/>
+            </a:r>
+          </a:p>
+          <a:p>
+            <a:r>
+              <a:t>IF LEARNERS ARE STUCK</a:t>
+            </a:r>
+          </a:p>
+          <a:p>
+            <a:r>
+              <a:t>Write one example row from each table. Circle keys and trace each match. Aggregate to the intended grain and check counts and totals.</a:t>
+            </a:r>
+          </a:p>
+          <a:p>
+            <a:r>
+              <a:t/>
+            </a:r>
+          </a:p>
+          <a:p>
+            <a:r>
+              <a:t>NEXT</a:t>
+            </a:r>
+          </a:p>
+          <a:p>
+            <a:r>
+              <a:t>Can you answer these?. Move on after a learner can explain the current example or required action.</a:t>
+            </a:r>
+          </a:p>
         </p:txBody>
       </p:sp>
       <p:sp>
@@ -1097,8 +1784,8 @@
 </p:notes>
 </file>
 
-<file path=ppt/notesSlides/notesSlide18.xml><?xml version="1.0" encoding="utf-8"?>
-<p:notes xmlns:a="http://schemas.openxmlformats.org/drawingml/2006/main" xmlns:p="http://schemas.openxmlformats.org/presentationml/2006/main" xmlns:r="http://schemas.openxmlformats.org/officeDocument/2006/relationships">
+<file path=ppt/notesSlides/notesSlide16.xml><?xml version="1.0" encoding="utf-8"?>
+<p:notes xmlns:a="http://schemas.openxmlformats.org/drawingml/2006/main" xmlns:p="http://schemas.openxmlformats.org/presentationml/2006/main">
   <p:cSld>
     <p:spTree>
       <p:nvGrpSpPr>
@@ -1142,7 +1829,157 @@
           <a:lstStyle/>
           <a:p>
             <a:r>
-              <a:t>No SQL tonight. In DB Browser's Browse Data tab, work through all six tables and fill in the sheet: grain, primary key, foreign keys. Then draw the six boxes and the arrows between them on paper. Drawing it by hand is what makes it stick.</a:t>
+              <a:t>TEACHING PURPOSE</a:t>
+            </a:r>
+          </a:p>
+          <a:p>
+            <a:r>
+              <a:t>Can you answer these?</a:t>
+            </a:r>
+          </a:p>
+          <a:p>
+            <a:r>
+              <a:t/>
+            </a:r>
+          </a:p>
+          <a:p>
+            <a:r>
+              <a:t>CONNECT</a:t>
+            </a:r>
+          </a:p>
+          <a:p>
+            <a:r>
+              <a:t>Build on the preceding slide: Assuming one row means what you assume it means. Every wrong total later in this course comes from a grain nobody said out loud..</a:t>
+            </a:r>
+          </a:p>
+          <a:p>
+            <a:r>
+              <a:t/>
+            </a:r>
+          </a:p>
+          <a:p>
+            <a:r>
+              <a:t>EXPLAIN IN ORDINARY WORDS</a:t>
+            </a:r>
+          </a:p>
+          <a:p>
+            <a:r>
+              <a:t>Grain means what one row represents. A key identifies a row; a primary key may use more than one column. A join matches keys, and multiple matches can multiply rows.</a:t>
+            </a:r>
+          </a:p>
+          <a:p>
+            <a:r>
+              <a:t/>
+            </a:r>
+          </a:p>
+          <a:p>
+            <a:r>
+              <a:t>CHECK AND EXPECTED ANSWER</a:t>
+            </a:r>
+          </a:p>
+          <a:p>
+            <a:r>
+              <a:t>One order has two lines. After joining orders to lines, how many rows for it? Two. Summing a repeated order-level total would double-count.</a:t>
+            </a:r>
+          </a:p>
+          <a:p>
+            <a:r>
+              <a:t/>
+            </a:r>
+          </a:p>
+          <a:p>
+            <a:r>
+              <a:t>IF LEARNERS ARE STUCK</a:t>
+            </a:r>
+          </a:p>
+          <a:p>
+            <a:r>
+              <a:t>Write one example row from each table. Circle keys and trace each match. Aggregate to the intended grain and check counts and totals.</a:t>
+            </a:r>
+          </a:p>
+          <a:p>
+            <a:r>
+              <a:t/>
+            </a:r>
+          </a:p>
+          <a:p>
+            <a:r>
+              <a:t>DISCUSSION KEY FOR THIS SLIDE</a:t>
+            </a:r>
+          </a:p>
+          <a:p>
+            <a:r>
+              <a:t>ANSWERS</a:t>
+            </a:r>
+          </a:p>
+          <a:p>
+            <a:r>
+              <a:t>How did you do?</a:t>
+            </a:r>
+          </a:p>
+          <a:p>
+            <a:r>
+              <a:t>A</a:t>
+            </a:r>
+          </a:p>
+          <a:p>
+            <a:r>
+              <a:t>One edit or many</a:t>
+            </a:r>
+          </a:p>
+          <a:p>
+            <a:r>
+              <a:t>One edit in the customers table. In a flat sheet, one edit per order that customer ever placed, and the ones you miss stay wrong and keep being summed.</a:t>
+            </a:r>
+          </a:p>
+          <a:p>
+            <a:r>
+              <a:t>B</a:t>
+            </a:r>
+          </a:p>
+          <a:p>
+            <a:r>
+              <a:t>Empty customer_id on 172 orders</a:t>
+            </a:r>
+          </a:p>
+          <a:p>
+            <a:r>
+              <a:t>No. It is walk-in trade: a real order with real revenue and no customer recorded. It becomes an error only if somebody joins to customers without noticing, which silently removes UGX 390,632,335 from the answer.</a:t>
+            </a:r>
+          </a:p>
+          <a:p>
+            <a:r>
+              <a:t>C</a:t>
+            </a:r>
+          </a:p>
+          <a:p>
+            <a:r>
+              <a:t>Row count after joining orders to lines</a:t>
+            </a:r>
+          </a:p>
+          <a:p>
+            <a:r>
+              <a:t>More. It is one-to-many, so each order appears once per line: 6,000 becomes 20,234. That is correct, and summing an order-level figure on that result is not.</a:t>
+            </a:r>
+          </a:p>
+          <a:p>
+            <a:r>
+              <a:t>Let learners attempt first; use this to explain the reasoning, not just reveal the answer.</a:t>
+            </a:r>
+          </a:p>
+          <a:p>
+            <a:r>
+              <a:t/>
+            </a:r>
+          </a:p>
+          <a:p>
+            <a:r>
+              <a:t>NEXT</a:t>
+            </a:r>
+          </a:p>
+          <a:p>
+            <a:r>
+              <a:t>How did you do?. Move on after a learner can explain the current example or required action.</a:t>
             </a:r>
           </a:p>
         </p:txBody>
@@ -1167,8 +2004,8 @@
 </p:notes>
 </file>
 
-<file path=ppt/notesSlides/notesSlide19.xml><?xml version="1.0" encoding="utf-8"?>
-<p:notes xmlns:a="http://schemas.openxmlformats.org/drawingml/2006/main" xmlns:p="http://schemas.openxmlformats.org/presentationml/2006/main" xmlns:r="http://schemas.openxmlformats.org/officeDocument/2006/relationships">
+<file path=ppt/notesSlides/notesSlide17.xml><?xml version="1.0" encoding="utf-8"?>
+<p:notes xmlns:a="http://schemas.openxmlformats.org/drawingml/2006/main" xmlns:p="http://schemas.openxmlformats.org/presentationml/2006/main">
   <p:cSld>
     <p:spTree>
       <p:nvGrpSpPr>
@@ -1210,7 +2047,91 @@
         <p:txBody>
           <a:bodyPr/>
           <a:lstStyle/>
-          <a:p/>
+          <a:p>
+            <a:r>
+              <a:t>TEACHING PURPOSE</a:t>
+            </a:r>
+          </a:p>
+          <a:p>
+            <a:r>
+              <a:t>How did you do?</a:t>
+            </a:r>
+          </a:p>
+          <a:p>
+            <a:r>
+              <a:t/>
+            </a:r>
+          </a:p>
+          <a:p>
+            <a:r>
+              <a:t>CONNECT</a:t>
+            </a:r>
+          </a:p>
+          <a:p>
+            <a:r>
+              <a:t>Build on the preceding slide: Can you answer these?.</a:t>
+            </a:r>
+          </a:p>
+          <a:p>
+            <a:r>
+              <a:t/>
+            </a:r>
+          </a:p>
+          <a:p>
+            <a:r>
+              <a:t>EXPLAIN IN ORDINARY WORDS</a:t>
+            </a:r>
+          </a:p>
+          <a:p>
+            <a:r>
+              <a:t>Grain means what one row represents. A key identifies a row; a primary key may use more than one column. A join matches keys, and multiple matches can multiply rows.</a:t>
+            </a:r>
+          </a:p>
+          <a:p>
+            <a:r>
+              <a:t/>
+            </a:r>
+          </a:p>
+          <a:p>
+            <a:r>
+              <a:t>CHECK AND EXPECTED ANSWER</a:t>
+            </a:r>
+          </a:p>
+          <a:p>
+            <a:r>
+              <a:t>One order has two lines. After joining orders to lines, how many rows for it? Two. Summing a repeated order-level total would double-count.</a:t>
+            </a:r>
+          </a:p>
+          <a:p>
+            <a:r>
+              <a:t/>
+            </a:r>
+          </a:p>
+          <a:p>
+            <a:r>
+              <a:t>IF LEARNERS ARE STUCK</a:t>
+            </a:r>
+          </a:p>
+          <a:p>
+            <a:r>
+              <a:t>Write one example row from each table. Circle keys and trace each match. Aggregate to the intended grain and check counts and totals.</a:t>
+            </a:r>
+          </a:p>
+          <a:p>
+            <a:r>
+              <a:t/>
+            </a:r>
+          </a:p>
+          <a:p>
+            <a:r>
+              <a:t>NEXT</a:t>
+            </a:r>
+          </a:p>
+          <a:p>
+            <a:r>
+              <a:t>Map the six tables by clicking. Move on after a learner can explain the current example or required action.</a:t>
+            </a:r>
+          </a:p>
         </p:txBody>
       </p:sp>
       <p:sp>
@@ -1233,8 +2154,8 @@
 </p:notes>
 </file>
 
-<file path=ppt/notesSlides/notesSlide2.xml><?xml version="1.0" encoding="utf-8"?>
-<p:notes xmlns:a="http://schemas.openxmlformats.org/drawingml/2006/main" xmlns:p="http://schemas.openxmlformats.org/presentationml/2006/main" xmlns:r="http://schemas.openxmlformats.org/officeDocument/2006/relationships">
+<file path=ppt/notesSlides/notesSlide18.xml><?xml version="1.0" encoding="utf-8"?>
+<p:notes xmlns:a="http://schemas.openxmlformats.org/drawingml/2006/main" xmlns:p="http://schemas.openxmlformats.org/presentationml/2006/main">
   <p:cSld>
     <p:spTree>
       <p:nvGrpSpPr>
@@ -1278,7 +2199,102 @@
           <a:lstStyle/>
           <a:p>
             <a:r>
-              <a:t>Tonight is session 2 of twelve.</a:t>
+              <a:t>TEACHING PURPOSE</a:t>
+            </a:r>
+          </a:p>
+          <a:p>
+            <a:r>
+              <a:t>Map the six tables by clicking</a:t>
+            </a:r>
+          </a:p>
+          <a:p>
+            <a:r>
+              <a:t/>
+            </a:r>
+          </a:p>
+          <a:p>
+            <a:r>
+              <a:t>CONNECT</a:t>
+            </a:r>
+          </a:p>
+          <a:p>
+            <a:r>
+              <a:t>Build on the preceding slide: How did you do?.</a:t>
+            </a:r>
+          </a:p>
+          <a:p>
+            <a:r>
+              <a:t/>
+            </a:r>
+          </a:p>
+          <a:p>
+            <a:r>
+              <a:t>LECTURER CUE</a:t>
+            </a:r>
+          </a:p>
+          <a:p>
+            <a:r>
+              <a:t>No SQL tonight. In DB Browser's Browse Data tab, work through all six tables and fill in the sheet: grain, primary key, foreign keys. Then draw the six boxes and the arrows between them on paper. Drawing it by hand is what makes it stick.</a:t>
+            </a:r>
+          </a:p>
+          <a:p>
+            <a:r>
+              <a:t/>
+            </a:r>
+          </a:p>
+          <a:p>
+            <a:r>
+              <a:t>EXPLAIN IN ORDINARY WORDS</a:t>
+            </a:r>
+          </a:p>
+          <a:p>
+            <a:r>
+              <a:t>Grain means what one row represents. A key identifies a row; a primary key may use more than one column. A join matches keys, and multiple matches can multiply rows.</a:t>
+            </a:r>
+          </a:p>
+          <a:p>
+            <a:r>
+              <a:t/>
+            </a:r>
+          </a:p>
+          <a:p>
+            <a:r>
+              <a:t>CHECK AND EXPECTED ANSWER</a:t>
+            </a:r>
+          </a:p>
+          <a:p>
+            <a:r>
+              <a:t>One order has two lines. After joining orders to lines, how many rows for it? Two. Summing a repeated order-level total would double-count.</a:t>
+            </a:r>
+          </a:p>
+          <a:p>
+            <a:r>
+              <a:t/>
+            </a:r>
+          </a:p>
+          <a:p>
+            <a:r>
+              <a:t>IF LEARNERS ARE STUCK</a:t>
+            </a:r>
+          </a:p>
+          <a:p>
+            <a:r>
+              <a:t>Write one example row from each table. Circle keys and trace each match. Aggregate to the intended grain and check counts and totals.</a:t>
+            </a:r>
+          </a:p>
+          <a:p>
+            <a:r>
+              <a:t/>
+            </a:r>
+          </a:p>
+          <a:p>
+            <a:r>
+              <a:t>NEXT</a:t>
+            </a:r>
+          </a:p>
+          <a:p>
+            <a:r>
+              <a:t>What you can do now. Move on after a learner can explain the current example or required action.</a:t>
             </a:r>
           </a:p>
         </p:txBody>
@@ -1303,8 +2319,8 @@
 </p:notes>
 </file>
 
-<file path=ppt/notesSlides/notesSlide20.xml><?xml version="1.0" encoding="utf-8"?>
-<p:notes xmlns:a="http://schemas.openxmlformats.org/drawingml/2006/main" xmlns:p="http://schemas.openxmlformats.org/presentationml/2006/main" xmlns:r="http://schemas.openxmlformats.org/officeDocument/2006/relationships">
+<file path=ppt/notesSlides/notesSlide19.xml><?xml version="1.0" encoding="utf-8"?>
+<p:notes xmlns:a="http://schemas.openxmlformats.org/drawingml/2006/main" xmlns:p="http://schemas.openxmlformats.org/presentationml/2006/main">
   <p:cSld>
     <p:spTree>
       <p:nvGrpSpPr>
@@ -1348,7 +2364,87 @@
           <a:lstStyle/>
           <a:p>
             <a:r>
-              <a:t>Take one report you receive at work and work out how many tables it was probably built from. Name them and the key each would join on. You will be right more often than you expect.</a:t>
+              <a:t>TEACHING PURPOSE</a:t>
+            </a:r>
+          </a:p>
+          <a:p>
+            <a:r>
+              <a:t>What you can do now</a:t>
+            </a:r>
+          </a:p>
+          <a:p>
+            <a:r>
+              <a:t/>
+            </a:r>
+          </a:p>
+          <a:p>
+            <a:r>
+              <a:t>CONNECT</a:t>
+            </a:r>
+          </a:p>
+          <a:p>
+            <a:r>
+              <a:t>Build on the preceding slide: Map the six tables by clicking.</a:t>
+            </a:r>
+          </a:p>
+          <a:p>
+            <a:r>
+              <a:t/>
+            </a:r>
+          </a:p>
+          <a:p>
+            <a:r>
+              <a:t>EXPLAIN IN ORDINARY WORDS</a:t>
+            </a:r>
+          </a:p>
+          <a:p>
+            <a:r>
+              <a:t>Grain means what one row represents. A key identifies a row; a primary key may use more than one column. A join matches keys, and multiple matches can multiply rows.</a:t>
+            </a:r>
+          </a:p>
+          <a:p>
+            <a:r>
+              <a:t/>
+            </a:r>
+          </a:p>
+          <a:p>
+            <a:r>
+              <a:t>CHECK AND EXPECTED ANSWER</a:t>
+            </a:r>
+          </a:p>
+          <a:p>
+            <a:r>
+              <a:t>One order has two lines. After joining orders to lines, how many rows for it? Two. Summing a repeated order-level total would double-count.</a:t>
+            </a:r>
+          </a:p>
+          <a:p>
+            <a:r>
+              <a:t/>
+            </a:r>
+          </a:p>
+          <a:p>
+            <a:r>
+              <a:t>IF LEARNERS ARE STUCK</a:t>
+            </a:r>
+          </a:p>
+          <a:p>
+            <a:r>
+              <a:t>Write one example row from each table. Circle keys and trace each match. Aggregate to the intended grain and check counts and totals.</a:t>
+            </a:r>
+          </a:p>
+          <a:p>
+            <a:r>
+              <a:t/>
+            </a:r>
+          </a:p>
+          <a:p>
+            <a:r>
+              <a:t>NEXT</a:t>
+            </a:r>
+          </a:p>
+          <a:p>
+            <a:r>
+              <a:t>Before the next session. Move on after a learner can explain the current example or required action.</a:t>
             </a:r>
           </a:p>
         </p:txBody>
@@ -1373,8 +2469,8 @@
 </p:notes>
 </file>
 
-<file path=ppt/notesSlides/notesSlide21.xml><?xml version="1.0" encoding="utf-8"?>
-<p:notes xmlns:a="http://schemas.openxmlformats.org/drawingml/2006/main" xmlns:p="http://schemas.openxmlformats.org/presentationml/2006/main" xmlns:r="http://schemas.openxmlformats.org/officeDocument/2006/relationships">
+<file path=ppt/notesSlides/notesSlide2.xml><?xml version="1.0" encoding="utf-8"?>
+<p:notes xmlns:a="http://schemas.openxmlformats.org/drawingml/2006/main" xmlns:p="http://schemas.openxmlformats.org/presentationml/2006/main">
   <p:cSld>
     <p:spTree>
       <p:nvGrpSpPr>
@@ -1418,7 +2514,102 @@
           <a:lstStyle/>
           <a:p>
             <a:r>
-              <a:t>Nearly every wrong total in the rest of this course comes from a grain nobody stated. Two sessions with no code buys you that habit, and it is the cheapest thing you will learn here.</a:t>
+              <a:t>TEACHING PURPOSE</a:t>
+            </a:r>
+          </a:p>
+          <a:p>
+            <a:r>
+              <a:t>Where tonight sits</a:t>
+            </a:r>
+          </a:p>
+          <a:p>
+            <a:r>
+              <a:t/>
+            </a:r>
+          </a:p>
+          <a:p>
+            <a:r>
+              <a:t>CONNECT</a:t>
+            </a:r>
+          </a:p>
+          <a:p>
+            <a:r>
+              <a:t>Build on the preceding slide: Why data lives in several tables.</a:t>
+            </a:r>
+          </a:p>
+          <a:p>
+            <a:r>
+              <a:t/>
+            </a:r>
+          </a:p>
+          <a:p>
+            <a:r>
+              <a:t>LECTURER CUE</a:t>
+            </a:r>
+          </a:p>
+          <a:p>
+            <a:r>
+              <a:t>Tonight is session 2 of fifteen.</a:t>
+            </a:r>
+          </a:p>
+          <a:p>
+            <a:r>
+              <a:t/>
+            </a:r>
+          </a:p>
+          <a:p>
+            <a:r>
+              <a:t>EXPLAIN IN ORDINARY WORDS</a:t>
+            </a:r>
+          </a:p>
+          <a:p>
+            <a:r>
+              <a:t>Grain means what one row represents. A key identifies a row; a primary key may use more than one column. A join matches keys, and multiple matches can multiply rows.</a:t>
+            </a:r>
+          </a:p>
+          <a:p>
+            <a:r>
+              <a:t/>
+            </a:r>
+          </a:p>
+          <a:p>
+            <a:r>
+              <a:t>CHECK AND EXPECTED ANSWER</a:t>
+            </a:r>
+          </a:p>
+          <a:p>
+            <a:r>
+              <a:t>One order has two lines. After joining orders to lines, how many rows for it? Two. Summing a repeated order-level total would double-count.</a:t>
+            </a:r>
+          </a:p>
+          <a:p>
+            <a:r>
+              <a:t/>
+            </a:r>
+          </a:p>
+          <a:p>
+            <a:r>
+              <a:t>IF LEARNERS ARE STUCK</a:t>
+            </a:r>
+          </a:p>
+          <a:p>
+            <a:r>
+              <a:t>Write one example row from each table. Circle keys and trace each match. Aggregate to the intended grain and check counts and totals.</a:t>
+            </a:r>
+          </a:p>
+          <a:p>
+            <a:r>
+              <a:t/>
+            </a:r>
+          </a:p>
+          <a:p>
+            <a:r>
+              <a:t>NEXT</a:t>
+            </a:r>
+          </a:p>
+          <a:p>
+            <a:r>
+              <a:t>The words for tonight. Move on after a learner can explain the current example or required action.</a:t>
             </a:r>
           </a:p>
         </p:txBody>
@@ -1443,8 +2634,8 @@
 </p:notes>
 </file>
 
-<file path=ppt/notesSlides/notesSlide3.xml><?xml version="1.0" encoding="utf-8"?>
-<p:notes xmlns:a="http://schemas.openxmlformats.org/drawingml/2006/main" xmlns:p="http://schemas.openxmlformats.org/presentationml/2006/main" xmlns:r="http://schemas.openxmlformats.org/officeDocument/2006/relationships">
+<file path=ppt/notesSlides/notesSlide20.xml><?xml version="1.0" encoding="utf-8"?>
+<p:notes xmlns:a="http://schemas.openxmlformats.org/drawingml/2006/main" xmlns:p="http://schemas.openxmlformats.org/presentationml/2006/main">
   <p:cSld>
     <p:spTree>
       <p:nvGrpSpPr>
@@ -1486,7 +2677,106 @@
         <p:txBody>
           <a:bodyPr/>
           <a:lstStyle/>
-          <a:p/>
+          <a:p>
+            <a:r>
+              <a:t>TEACHING PURPOSE</a:t>
+            </a:r>
+          </a:p>
+          <a:p>
+            <a:r>
+              <a:t>Before the next session</a:t>
+            </a:r>
+          </a:p>
+          <a:p>
+            <a:r>
+              <a:t/>
+            </a:r>
+          </a:p>
+          <a:p>
+            <a:r>
+              <a:t>CONNECT</a:t>
+            </a:r>
+          </a:p>
+          <a:p>
+            <a:r>
+              <a:t>Build on the preceding slide: What you can do now.</a:t>
+            </a:r>
+          </a:p>
+          <a:p>
+            <a:r>
+              <a:t/>
+            </a:r>
+          </a:p>
+          <a:p>
+            <a:r>
+              <a:t>LECTURER CUE</a:t>
+            </a:r>
+          </a:p>
+          <a:p>
+            <a:r>
+              <a:t>Take one report you receive at work and work out how many tables it was probably built from. Name them and the key each would join on. You will be right more often than you expect.</a:t>
+            </a:r>
+          </a:p>
+          <a:p>
+            <a:r>
+              <a:t/>
+            </a:r>
+          </a:p>
+          <a:p>
+            <a:r>
+              <a:t>EXPLAIN IN ORDINARY WORDS</a:t>
+            </a:r>
+          </a:p>
+          <a:p>
+            <a:r>
+              <a:t>Grain means what one row represents. A key identifies a row; a primary key may use more than one column. A join matches keys, and multiple matches can multiply rows.</a:t>
+            </a:r>
+          </a:p>
+          <a:p>
+            <a:r>
+              <a:t/>
+            </a:r>
+          </a:p>
+          <a:p>
+            <a:r>
+              <a:t>CHECK AND EXPECTED ANSWER</a:t>
+            </a:r>
+          </a:p>
+          <a:p>
+            <a:r>
+              <a:t>One order has two lines. After joining orders to lines, how many rows for it? Two. Summing a repeated order-level total would double-count.</a:t>
+            </a:r>
+          </a:p>
+          <a:p>
+            <a:r>
+              <a:t/>
+            </a:r>
+          </a:p>
+          <a:p>
+            <a:r>
+              <a:t>IF LEARNERS ARE STUCK</a:t>
+            </a:r>
+          </a:p>
+          <a:p>
+            <a:r>
+              <a:t>Write one example row from each table. Circle keys and trace each match. Aggregate to the intended grain and check counts and totals.</a:t>
+            </a:r>
+          </a:p>
+          <a:p>
+            <a:r>
+              <a:t/>
+            </a:r>
+          </a:p>
+          <a:p>
+            <a:r>
+              <a:t>NEXT</a:t>
+            </a:r>
+          </a:p>
+          <a:p>
+            <a:r>
+              <a:t>Say the grain out loud, every time. Move on after a learner can explain the current example or required action.</a:t>
+            </a:r>
+          </a:p>
         </p:txBody>
       </p:sp>
       <p:sp>
@@ -1509,8 +2799,8 @@
 </p:notes>
 </file>
 
-<file path=ppt/notesSlides/notesSlide4.xml><?xml version="1.0" encoding="utf-8"?>
-<p:notes xmlns:a="http://schemas.openxmlformats.org/drawingml/2006/main" xmlns:p="http://schemas.openxmlformats.org/presentationml/2006/main" xmlns:r="http://schemas.openxmlformats.org/officeDocument/2006/relationships">
+<file path=ppt/notesSlides/notesSlide21.xml><?xml version="1.0" encoding="utf-8"?>
+<p:notes xmlns:a="http://schemas.openxmlformats.org/drawingml/2006/main" xmlns:p="http://schemas.openxmlformats.org/presentationml/2006/main">
   <p:cSld>
     <p:spTree>
       <p:nvGrpSpPr>
@@ -1554,7 +2844,87 @@
           <a:lstStyle/>
           <a:p>
             <a:r>
-              <a:t>These three are what tonight is marked against, in the sense that the lab checks them.</a:t>
+              <a:t>TEACHING PURPOSE</a:t>
+            </a:r>
+          </a:p>
+          <a:p>
+            <a:r>
+              <a:t>Say the grain out loud, every time</a:t>
+            </a:r>
+          </a:p>
+          <a:p>
+            <a:r>
+              <a:t/>
+            </a:r>
+          </a:p>
+          <a:p>
+            <a:r>
+              <a:t>CONNECT</a:t>
+            </a:r>
+          </a:p>
+          <a:p>
+            <a:r>
+              <a:t>Build on the preceding slide: Before the next session.</a:t>
+            </a:r>
+          </a:p>
+          <a:p>
+            <a:r>
+              <a:t/>
+            </a:r>
+          </a:p>
+          <a:p>
+            <a:r>
+              <a:t>LECTURER CUE</a:t>
+            </a:r>
+          </a:p>
+          <a:p>
+            <a:r>
+              <a:t>Nearly every wrong total in the rest of this course comes from a grain nobody stated. Two sessions with no code buys you that habit, and it is the cheapest thing you will learn here.</a:t>
+            </a:r>
+          </a:p>
+          <a:p>
+            <a:r>
+              <a:t/>
+            </a:r>
+          </a:p>
+          <a:p>
+            <a:r>
+              <a:t>EXPLAIN IN ORDINARY WORDS</a:t>
+            </a:r>
+          </a:p>
+          <a:p>
+            <a:r>
+              <a:t>Grain means what one row represents. A key identifies a row; a primary key may use more than one column. A join matches keys, and multiple matches can multiply rows.</a:t>
+            </a:r>
+          </a:p>
+          <a:p>
+            <a:r>
+              <a:t/>
+            </a:r>
+          </a:p>
+          <a:p>
+            <a:r>
+              <a:t>CHECK AND EXPECTED ANSWER</a:t>
+            </a:r>
+          </a:p>
+          <a:p>
+            <a:r>
+              <a:t>One order has two lines. After joining orders to lines, how many rows for it? Two. Summing a repeated order-level total would double-count.</a:t>
+            </a:r>
+          </a:p>
+          <a:p>
+            <a:r>
+              <a:t/>
+            </a:r>
+          </a:p>
+          <a:p>
+            <a:r>
+              <a:t>IF LEARNERS ARE STUCK</a:t>
+            </a:r>
+          </a:p>
+          <a:p>
+            <a:r>
+              <a:t>Write one example row from each table. Circle keys and trace each match. Aggregate to the intended grain and check counts and totals.</a:t>
             </a:r>
           </a:p>
         </p:txBody>
@@ -1579,8 +2949,8 @@
 </p:notes>
 </file>
 
-<file path=ppt/notesSlides/notesSlide5.xml><?xml version="1.0" encoding="utf-8"?>
-<p:notes xmlns:a="http://schemas.openxmlformats.org/drawingml/2006/main" xmlns:p="http://schemas.openxmlformats.org/presentationml/2006/main" xmlns:r="http://schemas.openxmlformats.org/officeDocument/2006/relationships">
+<file path=ppt/notesSlides/notesSlide3.xml><?xml version="1.0" encoding="utf-8"?>
+<p:notes xmlns:a="http://schemas.openxmlformats.org/drawingml/2006/main" xmlns:p="http://schemas.openxmlformats.org/presentationml/2006/main">
   <p:cSld>
     <p:spTree>
       <p:nvGrpSpPr>
@@ -1624,7 +2994,87 @@
           <a:lstStyle/>
           <a:p>
             <a:r>
-              <a:t>Because one big sheet stores the same fact many times, and every copy is a chance to be wrong.</a:t>
+              <a:t>TEACHING PURPOSE</a:t>
+            </a:r>
+          </a:p>
+          <a:p>
+            <a:r>
+              <a:t>The words for tonight</a:t>
+            </a:r>
+          </a:p>
+          <a:p>
+            <a:r>
+              <a:t/>
+            </a:r>
+          </a:p>
+          <a:p>
+            <a:r>
+              <a:t>CONNECT</a:t>
+            </a:r>
+          </a:p>
+          <a:p>
+            <a:r>
+              <a:t>Build on the preceding slide: Where tonight sits.</a:t>
+            </a:r>
+          </a:p>
+          <a:p>
+            <a:r>
+              <a:t/>
+            </a:r>
+          </a:p>
+          <a:p>
+            <a:r>
+              <a:t>EXPLAIN IN ORDINARY WORDS</a:t>
+            </a:r>
+          </a:p>
+          <a:p>
+            <a:r>
+              <a:t>Grain means what one row represents. A key identifies a row; a primary key may use more than one column. A join matches keys, and multiple matches can multiply rows.</a:t>
+            </a:r>
+          </a:p>
+          <a:p>
+            <a:r>
+              <a:t/>
+            </a:r>
+          </a:p>
+          <a:p>
+            <a:r>
+              <a:t>CHECK AND EXPECTED ANSWER</a:t>
+            </a:r>
+          </a:p>
+          <a:p>
+            <a:r>
+              <a:t>One order has two lines. After joining orders to lines, how many rows for it? Two. Summing a repeated order-level total would double-count.</a:t>
+            </a:r>
+          </a:p>
+          <a:p>
+            <a:r>
+              <a:t/>
+            </a:r>
+          </a:p>
+          <a:p>
+            <a:r>
+              <a:t>IF LEARNERS ARE STUCK</a:t>
+            </a:r>
+          </a:p>
+          <a:p>
+            <a:r>
+              <a:t>Write one example row from each table. Circle keys and trace each match. Aggregate to the intended grain and check counts and totals.</a:t>
+            </a:r>
+          </a:p>
+          <a:p>
+            <a:r>
+              <a:t/>
+            </a:r>
+          </a:p>
+          <a:p>
+            <a:r>
+              <a:t>NEXT</a:t>
+            </a:r>
+          </a:p>
+          <a:p>
+            <a:r>
+              <a:t>By the end of tonight you can…. Move on after a learner can explain the current example or required action.</a:t>
             </a:r>
           </a:p>
         </p:txBody>
@@ -1649,8 +3099,8 @@
 </p:notes>
 </file>
 
-<file path=ppt/notesSlides/notesSlide6.xml><?xml version="1.0" encoding="utf-8"?>
-<p:notes xmlns:a="http://schemas.openxmlformats.org/drawingml/2006/main" xmlns:p="http://schemas.openxmlformats.org/presentationml/2006/main" xmlns:r="http://schemas.openxmlformats.org/officeDocument/2006/relationships">
+<file path=ppt/notesSlides/notesSlide4.xml><?xml version="1.0" encoding="utf-8"?>
+<p:notes xmlns:a="http://schemas.openxmlformats.org/drawingml/2006/main" xmlns:p="http://schemas.openxmlformats.org/presentationml/2006/main">
   <p:cSld>
     <p:spTree>
       <p:nvGrpSpPr>
@@ -1692,7 +3142,106 @@
         <p:txBody>
           <a:bodyPr/>
           <a:lstStyle/>
-          <a:p/>
+          <a:p>
+            <a:r>
+              <a:t>TEACHING PURPOSE</a:t>
+            </a:r>
+          </a:p>
+          <a:p>
+            <a:r>
+              <a:t>By the end of tonight you can…</a:t>
+            </a:r>
+          </a:p>
+          <a:p>
+            <a:r>
+              <a:t/>
+            </a:r>
+          </a:p>
+          <a:p>
+            <a:r>
+              <a:t>CONNECT</a:t>
+            </a:r>
+          </a:p>
+          <a:p>
+            <a:r>
+              <a:t>Build on the preceding slide: The words for tonight.</a:t>
+            </a:r>
+          </a:p>
+          <a:p>
+            <a:r>
+              <a:t/>
+            </a:r>
+          </a:p>
+          <a:p>
+            <a:r>
+              <a:t>LECTURER CUE</a:t>
+            </a:r>
+          </a:p>
+          <a:p>
+            <a:r>
+              <a:t>These three are what tonight is marked against, in the sense that the lab checks them.</a:t>
+            </a:r>
+          </a:p>
+          <a:p>
+            <a:r>
+              <a:t/>
+            </a:r>
+          </a:p>
+          <a:p>
+            <a:r>
+              <a:t>EXPLAIN IN ORDINARY WORDS</a:t>
+            </a:r>
+          </a:p>
+          <a:p>
+            <a:r>
+              <a:t>Grain means what one row represents. A key identifies a row; a primary key may use more than one column. A join matches keys, and multiple matches can multiply rows.</a:t>
+            </a:r>
+          </a:p>
+          <a:p>
+            <a:r>
+              <a:t/>
+            </a:r>
+          </a:p>
+          <a:p>
+            <a:r>
+              <a:t>CHECK AND EXPECTED ANSWER</a:t>
+            </a:r>
+          </a:p>
+          <a:p>
+            <a:r>
+              <a:t>One order has two lines. After joining orders to lines, how many rows for it? Two. Summing a repeated order-level total would double-count.</a:t>
+            </a:r>
+          </a:p>
+          <a:p>
+            <a:r>
+              <a:t/>
+            </a:r>
+          </a:p>
+          <a:p>
+            <a:r>
+              <a:t>IF LEARNERS ARE STUCK</a:t>
+            </a:r>
+          </a:p>
+          <a:p>
+            <a:r>
+              <a:t>Write one example row from each table. Circle keys and trace each match. Aggregate to the intended grain and check counts and totals.</a:t>
+            </a:r>
+          </a:p>
+          <a:p>
+            <a:r>
+              <a:t/>
+            </a:r>
+          </a:p>
+          <a:p>
+            <a:r>
+              <a:t>NEXT</a:t>
+            </a:r>
+          </a:p>
+          <a:p>
+            <a:r>
+              <a:t>Why is this data in six tables. Move on after a learner can explain the current example or required action.</a:t>
+            </a:r>
+          </a:p>
         </p:txBody>
       </p:sp>
       <p:sp>
@@ -1715,8 +3264,8 @@
 </p:notes>
 </file>
 
-<file path=ppt/notesSlides/notesSlide7.xml><?xml version="1.0" encoding="utf-8"?>
-<p:notes xmlns:a="http://schemas.openxmlformats.org/drawingml/2006/main" xmlns:p="http://schemas.openxmlformats.org/presentationml/2006/main" xmlns:r="http://schemas.openxmlformats.org/officeDocument/2006/relationships">
+<file path=ppt/notesSlides/notesSlide5.xml><?xml version="1.0" encoding="utf-8"?>
+<p:notes xmlns:a="http://schemas.openxmlformats.org/drawingml/2006/main" xmlns:p="http://schemas.openxmlformats.org/presentationml/2006/main">
   <p:cSld>
     <p:spTree>
       <p:nvGrpSpPr>
@@ -1760,7 +3309,102 @@
           <a:lstStyle/>
           <a:p>
             <a:r>
-              <a:t>A column whose value is never repeated, so it identifies exactly one row. Every proper table has one.</a:t>
+              <a:t>TEACHING PURPOSE</a:t>
+            </a:r>
+          </a:p>
+          <a:p>
+            <a:r>
+              <a:t>Why is this data in six tables</a:t>
+            </a:r>
+          </a:p>
+          <a:p>
+            <a:r>
+              <a:t/>
+            </a:r>
+          </a:p>
+          <a:p>
+            <a:r>
+              <a:t>CONNECT</a:t>
+            </a:r>
+          </a:p>
+          <a:p>
+            <a:r>
+              <a:t>Build on the preceding slide: By the end of tonight you can….</a:t>
+            </a:r>
+          </a:p>
+          <a:p>
+            <a:r>
+              <a:t/>
+            </a:r>
+          </a:p>
+          <a:p>
+            <a:r>
+              <a:t>LECTURER CUE</a:t>
+            </a:r>
+          </a:p>
+          <a:p>
+            <a:r>
+              <a:t>Because one big sheet stores the same fact many times, and every copy is a chance to be wrong.</a:t>
+            </a:r>
+          </a:p>
+          <a:p>
+            <a:r>
+              <a:t/>
+            </a:r>
+          </a:p>
+          <a:p>
+            <a:r>
+              <a:t>EXPLAIN IN ORDINARY WORDS</a:t>
+            </a:r>
+          </a:p>
+          <a:p>
+            <a:r>
+              <a:t>An observation describes the data. A finding answers a defined question with evidence. A recommendation adds an action, its justification and limits.</a:t>
+            </a:r>
+          </a:p>
+          <a:p>
+            <a:r>
+              <a:t/>
+            </a:r>
+          </a:p>
+          <a:p>
+            <a:r>
+              <a:t>CHECK AND EXPECTED ANSWER</a:t>
+            </a:r>
+          </a:p>
+          <a:p>
+            <a:r>
+              <a:t>Does a difference between two groups prove one caused the other? No. Other differences or selection may explain it.</a:t>
+            </a:r>
+          </a:p>
+          <a:p>
+            <a:r>
+              <a:t/>
+            </a:r>
+          </a:p>
+          <a:p>
+            <a:r>
+              <a:t>IF LEARNERS ARE STUCK</a:t>
+            </a:r>
+          </a:p>
+          <a:p>
+            <a:r>
+              <a:t>Ask for the population, time period, number and comparison. Then ask what additional evidence could change the recommendation.</a:t>
+            </a:r>
+          </a:p>
+          <a:p>
+            <a:r>
+              <a:t/>
+            </a:r>
+          </a:p>
+          <a:p>
+            <a:r>
+              <a:t>NEXT</a:t>
+            </a:r>
+          </a:p>
+          <a:p>
+            <a:r>
+              <a:t>Why not one big sheet. Move on after a learner can explain the current example or required action.</a:t>
             </a:r>
           </a:p>
         </p:txBody>
@@ -1785,8 +3429,8 @@
 </p:notes>
 </file>
 
-<file path=ppt/notesSlides/notesSlide8.xml><?xml version="1.0" encoding="utf-8"?>
-<p:notes xmlns:a="http://schemas.openxmlformats.org/drawingml/2006/main" xmlns:p="http://schemas.openxmlformats.org/presentationml/2006/main" xmlns:r="http://schemas.openxmlformats.org/officeDocument/2006/relationships">
+<file path=ppt/notesSlides/notesSlide6.xml><?xml version="1.0" encoding="utf-8"?>
+<p:notes xmlns:a="http://schemas.openxmlformats.org/drawingml/2006/main" xmlns:p="http://schemas.openxmlformats.org/presentationml/2006/main">
   <p:cSld>
     <p:spTree>
       <p:nvGrpSpPr>
@@ -1830,7 +3474,57 @@
           <a:lstStyle/>
           <a:p>
             <a:r>
-              <a:t>A column that holds another table's primary key. It is what connects the two tables.</a:t>
+              <a:t>TEACHING PURPOSE</a:t>
+            </a:r>
+          </a:p>
+          <a:p>
+            <a:r>
+              <a:t>What goes wrong with one big sheet</a:t>
+            </a:r>
+          </a:p>
+          <a:p>
+            <a:r>
+              <a:t/>
+            </a:r>
+          </a:p>
+          <a:p>
+            <a:r>
+              <a:t>CONNECT</a:t>
+            </a:r>
+          </a:p>
+          <a:p>
+            <a:r>
+              <a:t>Build on the preceding slide: Why not one big sheet.</a:t>
+            </a:r>
+          </a:p>
+          <a:p>
+            <a:r>
+              <a:t/>
+            </a:r>
+          </a:p>
+          <a:p>
+            <a:r>
+              <a:t>DELIVER THIS SLIDE</a:t>
+            </a:r>
+          </a:p>
+          <a:p>
+            <a:r>
+              <a:t>Read the stated purpose, then point to the named example or action on the slide. Ask learners to describe what they will do before moving on. For a break slide, announce the return time; for a section divider, name the next concrete task.</a:t>
+            </a:r>
+          </a:p>
+          <a:p>
+            <a:r>
+              <a:t/>
+            </a:r>
+          </a:p>
+          <a:p>
+            <a:r>
+              <a:t>NEXT</a:t>
+            </a:r>
+          </a:p>
+          <a:p>
+            <a:r>
+              <a:t>Primary key. Move on after a learner can explain the current example or required action.</a:t>
             </a:r>
           </a:p>
         </p:txBody>
@@ -1855,8 +3549,8 @@
 </p:notes>
 </file>
 
-<file path=ppt/notesSlides/notesSlide9.xml><?xml version="1.0" encoding="utf-8"?>
-<p:notes xmlns:a="http://schemas.openxmlformats.org/drawingml/2006/main" xmlns:p="http://schemas.openxmlformats.org/presentationml/2006/main" xmlns:r="http://schemas.openxmlformats.org/officeDocument/2006/relationships">
+<file path=ppt/notesSlides/notesSlide7.xml><?xml version="1.0" encoding="utf-8"?>
+<p:notes xmlns:a="http://schemas.openxmlformats.org/drawingml/2006/main" xmlns:p="http://schemas.openxmlformats.org/presentationml/2006/main">
   <p:cSld>
     <p:spTree>
       <p:nvGrpSpPr>
@@ -1900,7 +3594,387 @@
           <a:lstStyle/>
           <a:p>
             <a:r>
+              <a:t>TEACHING PURPOSE</a:t>
+            </a:r>
+          </a:p>
+          <a:p>
+            <a:r>
+              <a:t>Primary key</a:t>
+            </a:r>
+          </a:p>
+          <a:p>
+            <a:r>
+              <a:t/>
+            </a:r>
+          </a:p>
+          <a:p>
+            <a:r>
+              <a:t>CONNECT</a:t>
+            </a:r>
+          </a:p>
+          <a:p>
+            <a:r>
+              <a:t>Build on the preceding slide: What goes wrong with one big sheet.</a:t>
+            </a:r>
+          </a:p>
+          <a:p>
+            <a:r>
+              <a:t/>
+            </a:r>
+          </a:p>
+          <a:p>
+            <a:r>
+              <a:t>LECTURER CUE</a:t>
+            </a:r>
+          </a:p>
+          <a:p>
+            <a:r>
+              <a:t>A column whose value is never repeated, so it identifies exactly one row. Every proper table has one.</a:t>
+            </a:r>
+          </a:p>
+          <a:p>
+            <a:r>
+              <a:t/>
+            </a:r>
+          </a:p>
+          <a:p>
+            <a:r>
+              <a:t>EXPLAIN IN ORDINARY WORDS</a:t>
+            </a:r>
+          </a:p>
+          <a:p>
+            <a:r>
+              <a:t>Grain means what one row represents. A key identifies a row; a primary key may use more than one column. A join matches keys, and multiple matches can multiply rows.</a:t>
+            </a:r>
+          </a:p>
+          <a:p>
+            <a:r>
+              <a:t/>
+            </a:r>
+          </a:p>
+          <a:p>
+            <a:r>
+              <a:t>CHECK AND EXPECTED ANSWER</a:t>
+            </a:r>
+          </a:p>
+          <a:p>
+            <a:r>
+              <a:t>One order has two lines. After joining orders to lines, how many rows for it? Two. Summing a repeated order-level total would double-count.</a:t>
+            </a:r>
+          </a:p>
+          <a:p>
+            <a:r>
+              <a:t/>
+            </a:r>
+          </a:p>
+          <a:p>
+            <a:r>
+              <a:t>IF LEARNERS ARE STUCK</a:t>
+            </a:r>
+          </a:p>
+          <a:p>
+            <a:r>
+              <a:t>Write one example row from each table. Circle keys and trace each match. Aggregate to the intended grain and check counts and totals.</a:t>
+            </a:r>
+          </a:p>
+          <a:p>
+            <a:r>
+              <a:t/>
+            </a:r>
+          </a:p>
+          <a:p>
+            <a:r>
+              <a:t>NEXT</a:t>
+            </a:r>
+          </a:p>
+          <a:p>
+            <a:r>
+              <a:t>Foreign key. Move on after a learner can explain the current example or required action.</a:t>
+            </a:r>
+          </a:p>
+        </p:txBody>
+      </p:sp>
+      <p:sp>
+        <p:nvSpPr>
+          <p:cNvPr id="4" name="Slide Number Placeholder 3"/>
+          <p:cNvSpPr>
+            <a:spLocks noGrp="1"/>
+          </p:cNvSpPr>
+          <p:nvPr>
+            <p:ph type="sldNum" idx="5" sz="quarter"/>
+          </p:nvPr>
+        </p:nvSpPr>
+        <p:spPr/>
+      </p:sp>
+    </p:spTree>
+  </p:cSld>
+  <p:clrMapOvr>
+    <a:masterClrMapping/>
+  </p:clrMapOvr>
+</p:notes>
+</file>
+
+<file path=ppt/notesSlides/notesSlide8.xml><?xml version="1.0" encoding="utf-8"?>
+<p:notes xmlns:a="http://schemas.openxmlformats.org/drawingml/2006/main" xmlns:p="http://schemas.openxmlformats.org/presentationml/2006/main">
+  <p:cSld>
+    <p:spTree>
+      <p:nvGrpSpPr>
+        <p:cNvPr id="1" name=""/>
+        <p:cNvGrpSpPr/>
+        <p:nvPr/>
+      </p:nvGrpSpPr>
+      <p:grpSpPr>
+        <a:xfrm>
+          <a:off x="0" y="0"/>
+          <a:ext cx="0" cy="0"/>
+          <a:chOff x="0" y="0"/>
+          <a:chExt cx="0" cy="0"/>
+        </a:xfrm>
+      </p:grpSpPr>
+      <p:sp>
+        <p:nvSpPr>
+          <p:cNvPr id="2" name="Slide Image Placeholder 1"/>
+          <p:cNvSpPr>
+            <a:spLocks noGrp="1"/>
+          </p:cNvSpPr>
+          <p:nvPr>
+            <p:ph type="sldImg" idx="2"/>
+          </p:nvPr>
+        </p:nvSpPr>
+        <p:spPr/>
+      </p:sp>
+      <p:sp>
+        <p:nvSpPr>
+          <p:cNvPr id="3" name="Notes Placeholder 2"/>
+          <p:cNvSpPr>
+            <a:spLocks noGrp="1"/>
+          </p:cNvSpPr>
+          <p:nvPr>
+            <p:ph type="body" idx="3" sz="quarter"/>
+          </p:nvPr>
+        </p:nvSpPr>
+        <p:spPr/>
+        <p:txBody>
+          <a:bodyPr/>
+          <a:lstStyle/>
+          <a:p>
+            <a:r>
+              <a:t>TEACHING PURPOSE</a:t>
+            </a:r>
+          </a:p>
+          <a:p>
+            <a:r>
+              <a:t>Foreign key</a:t>
+            </a:r>
+          </a:p>
+          <a:p>
+            <a:r>
+              <a:t/>
+            </a:r>
+          </a:p>
+          <a:p>
+            <a:r>
+              <a:t>CONNECT</a:t>
+            </a:r>
+          </a:p>
+          <a:p>
+            <a:r>
+              <a:t>Build on the preceding slide: Primary key.</a:t>
+            </a:r>
+          </a:p>
+          <a:p>
+            <a:r>
+              <a:t/>
+            </a:r>
+          </a:p>
+          <a:p>
+            <a:r>
+              <a:t>LECTURER CUE</a:t>
+            </a:r>
+          </a:p>
+          <a:p>
+            <a:r>
+              <a:t>A column that holds another table's primary key. It is what connects the two tables.</a:t>
+            </a:r>
+          </a:p>
+          <a:p>
+            <a:r>
+              <a:t/>
+            </a:r>
+          </a:p>
+          <a:p>
+            <a:r>
+              <a:t>EXPLAIN IN ORDINARY WORDS</a:t>
+            </a:r>
+          </a:p>
+          <a:p>
+            <a:r>
+              <a:t>Grain means what one row represents. A key identifies a row; a primary key may use more than one column. A join matches keys, and multiple matches can multiply rows.</a:t>
+            </a:r>
+          </a:p>
+          <a:p>
+            <a:r>
+              <a:t/>
+            </a:r>
+          </a:p>
+          <a:p>
+            <a:r>
+              <a:t>CHECK AND EXPECTED ANSWER</a:t>
+            </a:r>
+          </a:p>
+          <a:p>
+            <a:r>
+              <a:t>One order has two lines. After joining orders to lines, how many rows for it? Two. Summing a repeated order-level total would double-count.</a:t>
+            </a:r>
+          </a:p>
+          <a:p>
+            <a:r>
+              <a:t/>
+            </a:r>
+          </a:p>
+          <a:p>
+            <a:r>
+              <a:t>IF LEARNERS ARE STUCK</a:t>
+            </a:r>
+          </a:p>
+          <a:p>
+            <a:r>
+              <a:t>Write one example row from each table. Circle keys and trace each match. Aggregate to the intended grain and check counts and totals.</a:t>
+            </a:r>
+          </a:p>
+          <a:p>
+            <a:r>
+              <a:t/>
+            </a:r>
+          </a:p>
+          <a:p>
+            <a:r>
+              <a:t>NEXT</a:t>
+            </a:r>
+          </a:p>
+          <a:p>
+            <a:r>
+              <a:t>One-to-many. Move on after a learner can explain the current example or required action.</a:t>
+            </a:r>
+          </a:p>
+        </p:txBody>
+      </p:sp>
+      <p:sp>
+        <p:nvSpPr>
+          <p:cNvPr id="4" name="Slide Number Placeholder 3"/>
+          <p:cNvSpPr>
+            <a:spLocks noGrp="1"/>
+          </p:cNvSpPr>
+          <p:nvPr>
+            <p:ph type="sldNum" idx="5" sz="quarter"/>
+          </p:nvPr>
+        </p:nvSpPr>
+        <p:spPr/>
+      </p:sp>
+    </p:spTree>
+  </p:cSld>
+  <p:clrMapOvr>
+    <a:masterClrMapping/>
+  </p:clrMapOvr>
+</p:notes>
+</file>
+
+<file path=ppt/notesSlides/notesSlide9.xml><?xml version="1.0" encoding="utf-8"?>
+<p:notes xmlns:a="http://schemas.openxmlformats.org/drawingml/2006/main" xmlns:p="http://schemas.openxmlformats.org/presentationml/2006/main">
+  <p:cSld>
+    <p:spTree>
+      <p:nvGrpSpPr>
+        <p:cNvPr id="1" name=""/>
+        <p:cNvGrpSpPr/>
+        <p:nvPr/>
+      </p:nvGrpSpPr>
+      <p:grpSpPr>
+        <a:xfrm>
+          <a:off x="0" y="0"/>
+          <a:ext cx="0" cy="0"/>
+          <a:chOff x="0" y="0"/>
+          <a:chExt cx="0" cy="0"/>
+        </a:xfrm>
+      </p:grpSpPr>
+      <p:sp>
+        <p:nvSpPr>
+          <p:cNvPr id="2" name="Slide Image Placeholder 1"/>
+          <p:cNvSpPr>
+            <a:spLocks noGrp="1"/>
+          </p:cNvSpPr>
+          <p:nvPr>
+            <p:ph type="sldImg" idx="2"/>
+          </p:nvPr>
+        </p:nvSpPr>
+        <p:spPr/>
+      </p:sp>
+      <p:sp>
+        <p:nvSpPr>
+          <p:cNvPr id="3" name="Notes Placeholder 2"/>
+          <p:cNvSpPr>
+            <a:spLocks noGrp="1"/>
+          </p:cNvSpPr>
+          <p:nvPr>
+            <p:ph type="body" idx="3" sz="quarter"/>
+          </p:nvPr>
+        </p:nvSpPr>
+        <p:spPr/>
+        <p:txBody>
+          <a:bodyPr/>
+          <a:lstStyle/>
+          <a:p>
+            <a:r>
+              <a:t>TEACHING PURPOSE</a:t>
+            </a:r>
+          </a:p>
+          <a:p>
+            <a:r>
+              <a:t>One-to-many</a:t>
+            </a:r>
+          </a:p>
+          <a:p>
+            <a:r>
+              <a:t/>
+            </a:r>
+          </a:p>
+          <a:p>
+            <a:r>
+              <a:t>CONNECT</a:t>
+            </a:r>
+          </a:p>
+          <a:p>
+            <a:r>
+              <a:t>Build on the preceding slide: Foreign key.</a:t>
+            </a:r>
+          </a:p>
+          <a:p>
+            <a:r>
+              <a:t/>
+            </a:r>
+          </a:p>
+          <a:p>
+            <a:r>
+              <a:t>LECTURER CUE</a:t>
+            </a:r>
+          </a:p>
+          <a:p>
+            <a:r>
               <a:t>One row on one side matches several rows on the other. It is the commonest relationship in business data and the reason totals go wrong.</a:t>
+            </a:r>
+          </a:p>
+          <a:p>
+            <a:r>
+              <a:t/>
+            </a:r>
+          </a:p>
+          <a:p>
+            <a:r>
+              <a:t>NEXT</a:t>
+            </a:r>
+          </a:p>
+          <a:p>
+            <a:r>
+              <a:t>The same business, two different grains. Move on after a learner can explain the current example or required action.</a:t>
             </a:r>
           </a:p>
         </p:txBody>
@@ -5964,7 +8038,7 @@
                 </a:solidFill>
                 <a:latin typeface="Calibri"/>
               </a:rPr>
-              <a:t>Grain, and what a join does to it. The grain figure: one row is one order against one row is one order line. Then the join figure: INNER against LEFT, and the walk-in orders that disappear from one and survive the other.</a:t>
+              <a:t>Grain, and what a join does to it.</a:t>
             </a:r>
           </a:p>
         </p:txBody>
@@ -6883,7 +8957,7 @@
         <p:spPr>
           <a:xfrm>
             <a:off x="685800" y="1600200"/>
-            <a:ext cx="10820095" cy="1100371"/>
+            <a:ext cx="10820095" cy="1603291"/>
           </a:xfrm>
           <a:prstGeom prst="rect">
             <a:avLst/>
@@ -6924,7 +8998,7 @@
         </p:nvSpPr>
         <p:spPr>
           <a:xfrm>
-            <a:off x="685800" y="2792011"/>
+            <a:off x="685800" y="3477811"/>
             <a:ext cx="10820095" cy="457200"/>
           </a:xfrm>
           <a:prstGeom prst="rect">
@@ -10030,7 +12104,7 @@
         <p:spPr>
           <a:xfrm>
             <a:off x="685800" y="1911095"/>
-            <a:ext cx="10820095" cy="1243584"/>
+            <a:ext cx="10820095" cy="1617199"/>
           </a:xfrm>
           <a:prstGeom prst="roundRect">
             <a:avLst>
@@ -10075,7 +12149,7 @@
         <p:spPr>
           <a:xfrm>
             <a:off x="978408" y="2112264"/>
-            <a:ext cx="10234879" cy="877823"/>
+            <a:ext cx="10234879" cy="1251439"/>
           </a:xfrm>
           <a:prstGeom prst="rect">
             <a:avLst/>
@@ -10116,7 +12190,7 @@
         </p:nvSpPr>
         <p:spPr>
           <a:xfrm>
-            <a:off x="685800" y="3465575"/>
+            <a:off x="685800" y="3802615"/>
             <a:ext cx="10820095" cy="310896"/>
           </a:xfrm>
           <a:prstGeom prst="rect">
@@ -10142,7 +12216,7 @@
                 </a:solidFill>
                 <a:latin typeface="Calibri"/>
               </a:rPr>
-              <a:t>Work these questions in order:</a:t>
+              <a:t>Work these questions in order</a:t>
             </a:r>
           </a:p>
         </p:txBody>
@@ -10155,8 +12229,8 @@
         </p:nvSpPr>
         <p:spPr>
           <a:xfrm>
-            <a:off x="685800" y="3886200"/>
-            <a:ext cx="5227167" cy="365760"/>
+            <a:off x="685800" y="4278103"/>
+            <a:ext cx="5227167" cy="385501"/>
           </a:xfrm>
           <a:prstGeom prst="rect">
             <a:avLst/>
@@ -10184,7 +12258,7 @@
                 </a:solidFill>
                 <a:latin typeface="Calibri"/>
               </a:rPr>
-              <a:t>→  Grain of each table: one row is one what?</a:t>
+              <a:t>Grain of each table: one row is one what?</a:t>
             </a:r>
           </a:p>
         </p:txBody>
@@ -10197,8 +12271,8 @@
         </p:nvSpPr>
         <p:spPr>
           <a:xfrm>
-            <a:off x="685800" y="4306824"/>
-            <a:ext cx="5227167" cy="365760"/>
+            <a:off x="685800" y="4755045"/>
+            <a:ext cx="5227167" cy="385501"/>
           </a:xfrm>
           <a:prstGeom prst="rect">
             <a:avLst/>
@@ -10226,7 +12300,7 @@
                 </a:solidFill>
                 <a:latin typeface="Calibri"/>
               </a:rPr>
-              <a:t>→  Primary key of each table.</a:t>
+              <a:t>Primary key of each table.</a:t>
             </a:r>
           </a:p>
         </p:txBody>
@@ -10239,8 +12313,8 @@
         </p:nvSpPr>
         <p:spPr>
           <a:xfrm>
-            <a:off x="685800" y="4727448"/>
-            <a:ext cx="5227167" cy="365760"/>
+            <a:off x="685800" y="5231987"/>
+            <a:ext cx="5227167" cy="385501"/>
           </a:xfrm>
           <a:prstGeom prst="rect">
             <a:avLst/>
@@ -10268,7 +12342,7 @@
                 </a:solidFill>
                 <a:latin typeface="Calibri"/>
               </a:rPr>
-              <a:t>→  Every column that points at another table.</a:t>
+              <a:t>Every column that points at another table.</a:t>
             </a:r>
           </a:p>
         </p:txBody>
@@ -10281,8 +12355,8 @@
         </p:nvSpPr>
         <p:spPr>
           <a:xfrm>
-            <a:off x="6278727" y="3886200"/>
-            <a:ext cx="5227167" cy="365760"/>
+            <a:off x="6278727" y="4278103"/>
+            <a:ext cx="5227167" cy="385501"/>
           </a:xfrm>
           <a:prstGeom prst="rect">
             <a:avLst/>
@@ -10310,7 +12384,7 @@
                 </a:solidFill>
                 <a:latin typeface="Calibri"/>
               </a:rPr>
-              <a:t>→  Draw the six boxes and the arrows, on paper.</a:t>
+              <a:t>Draw the six boxes and the arrows, on paper.</a:t>
             </a:r>
           </a:p>
         </p:txBody>
@@ -10323,8 +12397,8 @@
         </p:nvSpPr>
         <p:spPr>
           <a:xfrm>
-            <a:off x="6278727" y="4306824"/>
-            <a:ext cx="5227167" cy="365760"/>
+            <a:off x="6278727" y="4755045"/>
+            <a:ext cx="5227167" cy="385501"/>
           </a:xfrm>
           <a:prstGeom prst="rect">
             <a:avLst/>
@@ -10352,7 +12426,7 @@
                 </a:solidFill>
                 <a:latin typeface="Calibri"/>
               </a:rPr>
-              <a:t>→  Find an order with no customer and say what it means.</a:t>
+              <a:t>Find an order with no customer and say what it means.</a:t>
             </a:r>
           </a:p>
         </p:txBody>
@@ -13127,7 +15201,7 @@
                 </a:solidFill>
                 <a:latin typeface="Calibri"/>
               </a:rPr>
-              <a:t>Why not one big sheet. Start from the flat export everybody recognises and break it: a customer changes region, and the same fact now has to be edited in four hundred rows, some of which get missed. Then the same data as</a:t>
+              <a:t>Why not one big sheet.</a:t>
             </a:r>
           </a:p>
         </p:txBody>
